--- a/presentation/nauchny-klubok.pptx
+++ b/presentation/nauchny-klubok.pptx
@@ -3355,7 +3355,7 @@
         <p:spPr>
           <a:xfrm>
             <a:off x="822960" y="3977639"/>
-            <a:ext cx="8686800" cy="548640"/>
+            <a:ext cx="9601200" cy="548640"/>
           </a:xfrm>
           <a:prstGeom prst="rect">
             <a:avLst/>
@@ -3380,7 +3380,7 @@
                 </a:solidFill>
                 <a:latin typeface="Calibri"/>
               </a:rPr>
-              <a:t>Граф знаний, где числа не может исказить ни одна модель — они проверяются дословным совпадением с источником.</a:t>
+              <a:t>2 090 документов корпуса кейса · граф знаний, где числа не может исказить ни одна модель — они проверяются дословным совпадением с источником.</a:t>
             </a:r>
           </a:p>
         </p:txBody>
@@ -3394,7 +3394,7 @@
         <p:spPr>
           <a:xfrm>
             <a:off x="822960" y="5806440"/>
-            <a:ext cx="2505456" cy="502920"/>
+            <a:ext cx="2798064" cy="502920"/>
           </a:xfrm>
           <a:prstGeom prst="roundRect">
             <a:avLst>
@@ -3440,7 +3440,7 @@
         <p:spPr>
           <a:xfrm>
             <a:off x="822960" y="5806440"/>
-            <a:ext cx="2505456" cy="502920"/>
+            <a:ext cx="2798064" cy="502920"/>
           </a:xfrm>
           <a:prstGeom prst="rect">
             <a:avLst/>
@@ -3465,7 +3465,7 @@
                 </a:solidFill>
                 <a:latin typeface="Calibri"/>
               </a:rPr>
-              <a:t>101 публикация</a:t>
+              <a:t>2 090 публикаций</a:t>
             </a:r>
           </a:p>
         </p:txBody>
@@ -3478,8 +3478,8 @@
         </p:nvSpPr>
         <p:spPr>
           <a:xfrm>
-            <a:off x="3557016" y="5806440"/>
-            <a:ext cx="2505456" cy="502920"/>
+            <a:off x="3849624" y="5806440"/>
+            <a:ext cx="2651760" cy="502920"/>
           </a:xfrm>
           <a:prstGeom prst="roundRect">
             <a:avLst>
@@ -3524,8 +3524,8 @@
         </p:nvSpPr>
         <p:spPr>
           <a:xfrm>
-            <a:off x="3557016" y="5806440"/>
-            <a:ext cx="2505456" cy="502920"/>
+            <a:off x="3849624" y="5806440"/>
+            <a:ext cx="2651760" cy="502920"/>
           </a:xfrm>
           <a:prstGeom prst="rect">
             <a:avLst/>
@@ -3550,7 +3550,7 @@
                 </a:solidFill>
                 <a:latin typeface="Calibri"/>
               </a:rPr>
-              <a:t>20 843 условия</a:t>
+              <a:t>181 047 условий</a:t>
             </a:r>
           </a:p>
         </p:txBody>
@@ -3563,7 +3563,7 @@
         </p:nvSpPr>
         <p:spPr>
           <a:xfrm>
-            <a:off x="6291072" y="5806440"/>
+            <a:off x="6729983" y="5806440"/>
             <a:ext cx="2651760" cy="502920"/>
           </a:xfrm>
           <a:prstGeom prst="roundRect">
@@ -3609,7 +3609,7 @@
         </p:nvSpPr>
         <p:spPr>
           <a:xfrm>
-            <a:off x="6291072" y="5806440"/>
+            <a:off x="6729983" y="5806440"/>
             <a:ext cx="2651760" cy="502920"/>
           </a:xfrm>
           <a:prstGeom prst="rect">
@@ -3648,7 +3648,7 @@
         </p:nvSpPr>
         <p:spPr>
           <a:xfrm>
-            <a:off x="9171432" y="5806440"/>
+            <a:off x="9610344" y="5806440"/>
             <a:ext cx="2798064" cy="502920"/>
           </a:xfrm>
           <a:prstGeom prst="roundRect">
@@ -3694,7 +3694,7 @@
         </p:nvSpPr>
         <p:spPr>
           <a:xfrm>
-            <a:off x="9171432" y="5806440"/>
+            <a:off x="9610344" y="5806440"/>
             <a:ext cx="2798064" cy="502920"/>
           </a:xfrm>
           <a:prstGeom prst="rect">
@@ -4040,7 +4040,7 @@
         <p:spPr>
           <a:xfrm>
             <a:off x="822960" y="4114800"/>
-            <a:ext cx="2962656" cy="640080"/>
+            <a:ext cx="3456432" cy="640080"/>
           </a:xfrm>
           <a:prstGeom prst="rect">
             <a:avLst/>
@@ -4065,7 +4065,7 @@
                 </a:solidFill>
                 <a:latin typeface="Cambria"/>
               </a:rPr>
-              <a:t>101</a:t>
+              <a:t>2 090</a:t>
             </a:r>
           </a:p>
         </p:txBody>
@@ -4079,7 +4079,7 @@
         <p:spPr>
           <a:xfrm>
             <a:off x="822960" y="4800600"/>
-            <a:ext cx="2962656" cy="548640"/>
+            <a:ext cx="3456432" cy="548640"/>
           </a:xfrm>
           <a:prstGeom prst="rect">
             <a:avLst/>
@@ -4104,7 +4104,7 @@
                 </a:solidFill>
                 <a:latin typeface="Calibri"/>
               </a:rPr>
-              <a:t>документ обработан</a:t>
+              <a:t>документов обработано</a:t>
             </a:r>
           </a:p>
         </p:txBody>
@@ -4117,7 +4117,7 @@
         </p:nvSpPr>
         <p:spPr>
           <a:xfrm>
-            <a:off x="4105656" y="4114800"/>
+            <a:off x="4599432" y="4114800"/>
             <a:ext cx="2633472" cy="640080"/>
           </a:xfrm>
           <a:prstGeom prst="rect">
@@ -4143,7 +4143,7 @@
                 </a:solidFill>
                 <a:latin typeface="Cambria"/>
               </a:rPr>
-              <a:t>20 843</a:t>
+              <a:t>181 047</a:t>
             </a:r>
           </a:p>
         </p:txBody>
@@ -4156,7 +4156,7 @@
         </p:nvSpPr>
         <p:spPr>
           <a:xfrm>
-            <a:off x="4105656" y="4800600"/>
+            <a:off x="4599432" y="4800600"/>
             <a:ext cx="2633472" cy="548640"/>
           </a:xfrm>
           <a:prstGeom prst="rect">
@@ -4182,7 +4182,7 @@
                 </a:solidFill>
                 <a:latin typeface="Calibri"/>
               </a:rPr>
-              <a:t>числовых условия</a:t>
+              <a:t>числовых условий</a:t>
             </a:r>
           </a:p>
         </p:txBody>
@@ -4195,7 +4195,7 @@
         </p:nvSpPr>
         <p:spPr>
           <a:xfrm>
-            <a:off x="7059168" y="4114800"/>
+            <a:off x="7552944" y="4114800"/>
             <a:ext cx="4443983" cy="640080"/>
           </a:xfrm>
           <a:prstGeom prst="rect">
@@ -4234,7 +4234,7 @@
         </p:nvSpPr>
         <p:spPr>
           <a:xfrm>
-            <a:off x="7059168" y="4800600"/>
+            <a:off x="7552944" y="4800600"/>
             <a:ext cx="4443983" cy="548640"/>
           </a:xfrm>
           <a:prstGeom prst="rect">
@@ -4273,7 +4273,7 @@
         </p:nvSpPr>
         <p:spPr>
           <a:xfrm>
-            <a:off x="11823192" y="4114800"/>
+            <a:off x="12316967" y="4114800"/>
             <a:ext cx="2304288" cy="640080"/>
           </a:xfrm>
           <a:prstGeom prst="rect">
@@ -4299,7 +4299,7 @@
                 </a:solidFill>
                 <a:latin typeface="Cambria"/>
               </a:rPr>
-              <a:t>74</a:t>
+              <a:t>3</a:t>
             </a:r>
           </a:p>
         </p:txBody>
@@ -4312,7 +4312,7 @@
         </p:nvSpPr>
         <p:spPr>
           <a:xfrm>
-            <a:off x="11823192" y="4800600"/>
+            <a:off x="12316967" y="4800600"/>
             <a:ext cx="2304288" cy="548640"/>
           </a:xfrm>
           <a:prstGeom prst="rect">
@@ -4338,7 +4338,7 @@
                 </a:solidFill>
                 <a:latin typeface="Calibri"/>
               </a:rPr>
-              <a:t>сущности графа</a:t>
+              <a:t>LLM-провайдера</a:t>
             </a:r>
           </a:p>
         </p:txBody>
@@ -7725,7 +7725,7 @@
                 </a:solidFill>
                 <a:latin typeface="Calibri"/>
               </a:rPr>
-              <a:t>PDF/DOCX RU/EN</a:t>
+              <a:t>PDF/DOCX/XLS/PPTX</a:t>
             </a:r>
           </a:p>
           <a:p>
@@ -7741,7 +7741,7 @@
                 </a:solidFill>
                 <a:latin typeface="Calibri"/>
               </a:rPr>
-              <a:t>→ текст + метаданные</a:t>
+              <a:t>RU/EN + OCR сканов</a:t>
             </a:r>
           </a:p>
         </p:txBody>
@@ -7971,7 +7971,7 @@
                 </a:solidFill>
                 <a:latin typeface="Calibri"/>
               </a:rPr>
-              <a:t>20 843 условия</a:t>
+              <a:t>181 047 условий</a:t>
             </a:r>
           </a:p>
         </p:txBody>
@@ -10787,7 +10787,7 @@
                 </a:solidFill>
                 <a:latin typeface="Calibri"/>
               </a:rPr>
-              <a:t>PyMuPDF, python-docx, langdetect</a:t>
+              <a:t>PyMuPDF, docx, xls, pptx</a:t>
             </a:r>
           </a:p>
         </p:txBody>
@@ -10872,7 +10872,7 @@
                 </a:solidFill>
                 <a:latin typeface="Calibri"/>
               </a:rPr>
-              <a:t>Числа</a:t>
+              <a:t>OCR сканов</a:t>
             </a:r>
           </a:p>
         </p:txBody>
@@ -10911,7 +10911,7 @@
                 </a:solidFill>
                 <a:latin typeface="Calibri"/>
               </a:rPr>
-              <a:t>Regex-грамматика (собственная)</a:t>
+              <a:t>easyocr на GPU (RTX 5090)</a:t>
             </a:r>
           </a:p>
         </p:txBody>
@@ -10996,7 +10996,7 @@
                 </a:solidFill>
                 <a:latin typeface="Calibri"/>
               </a:rPr>
-              <a:t>Тезаурус</a:t>
+              <a:t>Числа</a:t>
             </a:r>
           </a:p>
         </p:txBody>
@@ -11035,7 +11035,7 @@
                 </a:solidFill>
                 <a:latin typeface="Calibri"/>
               </a:rPr>
-              <a:t>88 канонов, 400+ синонимов RU/EN</a:t>
+              <a:t>Regex-грамматика (собственная)</a:t>
             </a:r>
           </a:p>
         </p:txBody>
@@ -11120,7 +11120,7 @@
                 </a:solidFill>
                 <a:latin typeface="Calibri"/>
               </a:rPr>
-              <a:t>LLM-извлечение</a:t>
+              <a:t>Тезаурус</a:t>
             </a:r>
           </a:p>
         </p:txBody>
@@ -11159,7 +11159,7 @@
                 </a:solidFill>
                 <a:latin typeface="Calibri"/>
               </a:rPr>
-              <a:t>Строгая JSON-схема онтологии</a:t>
+              <a:t>88 канонов, 400+ синонимов RU/EN</a:t>
             </a:r>
           </a:p>
         </p:txBody>
@@ -11244,7 +11244,7 @@
                 </a:solidFill>
                 <a:latin typeface="Calibri"/>
               </a:rPr>
-              <a:t>Граф</a:t>
+              <a:t>LLM-извлечение</a:t>
             </a:r>
           </a:p>
         </p:txBody>
@@ -11283,7 +11283,7 @@
                 </a:solidFill>
                 <a:latin typeface="Calibri"/>
               </a:rPr>
-              <a:t>Kùzu (embedded, Cypher)</a:t>
+              <a:t>Строгая JSON-схема онтологии</a:t>
             </a:r>
           </a:p>
         </p:txBody>
@@ -11368,7 +11368,7 @@
                 </a:solidFill>
                 <a:latin typeface="Calibri"/>
               </a:rPr>
-              <a:t>Поиск</a:t>
+              <a:t>Граф</a:t>
             </a:r>
           </a:p>
         </p:txBody>
@@ -11407,7 +11407,7 @@
                 </a:solidFill>
                 <a:latin typeface="Calibri"/>
               </a:rPr>
-              <a:t>BM25 (rank_bm25) + фильтры графа</a:t>
+              <a:t>Kùzu (embedded, Cypher)</a:t>
             </a:r>
           </a:p>
         </p:txBody>
@@ -11531,7 +11531,7 @@
                 </a:solidFill>
                 <a:latin typeface="Calibri"/>
               </a:rPr>
-              <a:t>Yandex AI Studio → OpenRouter fallback</a:t>
+              <a:t>Yandex → OpenRouter → GigaChat</a:t>
             </a:r>
           </a:p>
         </p:txBody>

--- a/presentation/nauchny-klubok.pptx
+++ b/presentation/nauchny-klubok.pptx
@@ -3550,7 +3550,7 @@
                 </a:solidFill>
                 <a:latin typeface="Calibri"/>
               </a:rPr>
-              <a:t>181 047 условий</a:t>
+              <a:t>292 155 условий</a:t>
             </a:r>
           </a:p>
         </p:txBody>
@@ -4143,7 +4143,7 @@
                 </a:solidFill>
                 <a:latin typeface="Cambria"/>
               </a:rPr>
-              <a:t>181 047</a:t>
+              <a:t>292 155</a:t>
             </a:r>
           </a:p>
         </p:txBody>

--- a/presentation/nauchny-klubok.pptx
+++ b/presentation/nauchny-klubok.pptx
@@ -3635,7 +3635,7 @@
                 </a:solidFill>
                 <a:latin typeface="Calibri"/>
               </a:rPr>
-              <a:t>233 утверждения</a:t>
+              <a:t>665 утверждений</a:t>
             </a:r>
           </a:p>
         </p:txBody>
@@ -4221,7 +4221,7 @@
                 </a:solidFill>
                 <a:latin typeface="Cambria"/>
               </a:rPr>
-              <a:t>233</a:t>
+              <a:t>665</a:t>
             </a:r>
           </a:p>
         </p:txBody>
@@ -4260,7 +4260,7 @@
                 </a:solidFill>
                 <a:latin typeface="Calibri"/>
               </a:rPr>
-              <a:t>утверждения (100% verified)</a:t>
+              <a:t>утверждений (100% verified)</a:t>
             </a:r>
           </a:p>
         </p:txBody>
@@ -10468,7 +10468,7 @@
                 </a:solidFill>
                 <a:latin typeface="Calibri"/>
               </a:rPr>
-              <a:t>233 из 233 извлечённых LLM утверждений прошли string-match верификацию цитаты к исходному тексту документа.</a:t>
+              <a:t>665 из 665 извлечённых LLM утверждений прошли string-match верификацию цитаты к исходному тексту документа.</a:t>
             </a:r>
           </a:p>
           <a:p>
